--- a/企画書.pptx
+++ b/企画書.pptx
@@ -107,6 +107,11 @@
       </a:defRPr>
     </a:lvl9pPr>
   </p:defaultTextStyle>
+  <p:extLst>
+    <p:ext uri="{EFAFB233-063F-42B5-8137-9DF3F51BA10A}">
+      <p15:sldGuideLst xmlns:p15="http://schemas.microsoft.com/office/powerpoint/2012/main"/>
+    </p:ext>
+  </p:extLst>
 </p:presentation>
 </file>
 
@@ -241,7 +246,7 @@
           <a:p>
             <a:fld id="{788BAAB1-9E03-4253-A991-98CF19265507}" type="datetimeFigureOut">
               <a:rPr kumimoji="1" lang="ja-JP" altLang="en-US" smtClean="0"/>
-              <a:t>2026/10/5</a:t>
+              <a:t>2026/10/19</a:t>
             </a:fld>
             <a:endParaRPr kumimoji="1" lang="ja-JP" altLang="en-US"/>
           </a:p>
@@ -443,7 +448,7 @@
           <a:p>
             <a:fld id="{788BAAB1-9E03-4253-A991-98CF19265507}" type="datetimeFigureOut">
               <a:rPr kumimoji="1" lang="ja-JP" altLang="en-US" smtClean="0"/>
-              <a:t>2026/10/5</a:t>
+              <a:t>2026/10/19</a:t>
             </a:fld>
             <a:endParaRPr kumimoji="1" lang="ja-JP" altLang="en-US"/>
           </a:p>
@@ -655,7 +660,7 @@
           <a:p>
             <a:fld id="{788BAAB1-9E03-4253-A991-98CF19265507}" type="datetimeFigureOut">
               <a:rPr kumimoji="1" lang="ja-JP" altLang="en-US" smtClean="0"/>
-              <a:t>2026/10/5</a:t>
+              <a:t>2026/10/19</a:t>
             </a:fld>
             <a:endParaRPr kumimoji="1" lang="ja-JP" altLang="en-US"/>
           </a:p>
@@ -857,7 +862,7 @@
           <a:p>
             <a:fld id="{788BAAB1-9E03-4253-A991-98CF19265507}" type="datetimeFigureOut">
               <a:rPr kumimoji="1" lang="ja-JP" altLang="en-US" smtClean="0"/>
-              <a:t>2026/10/5</a:t>
+              <a:t>2026/10/19</a:t>
             </a:fld>
             <a:endParaRPr kumimoji="1" lang="ja-JP" altLang="en-US"/>
           </a:p>
@@ -1103,7 +1108,7 @@
           <a:p>
             <a:fld id="{788BAAB1-9E03-4253-A991-98CF19265507}" type="datetimeFigureOut">
               <a:rPr kumimoji="1" lang="ja-JP" altLang="en-US" smtClean="0"/>
-              <a:t>2026/10/5</a:t>
+              <a:t>2026/10/19</a:t>
             </a:fld>
             <a:endParaRPr kumimoji="1" lang="ja-JP" altLang="en-US"/>
           </a:p>
@@ -1399,7 +1404,7 @@
           <a:p>
             <a:fld id="{788BAAB1-9E03-4253-A991-98CF19265507}" type="datetimeFigureOut">
               <a:rPr kumimoji="1" lang="ja-JP" altLang="en-US" smtClean="0"/>
-              <a:t>2026/10/5</a:t>
+              <a:t>2026/10/19</a:t>
             </a:fld>
             <a:endParaRPr kumimoji="1" lang="ja-JP" altLang="en-US"/>
           </a:p>
@@ -1830,7 +1835,7 @@
           <a:p>
             <a:fld id="{788BAAB1-9E03-4253-A991-98CF19265507}" type="datetimeFigureOut">
               <a:rPr kumimoji="1" lang="ja-JP" altLang="en-US" smtClean="0"/>
-              <a:t>2026/10/5</a:t>
+              <a:t>2026/10/19</a:t>
             </a:fld>
             <a:endParaRPr kumimoji="1" lang="ja-JP" altLang="en-US"/>
           </a:p>
@@ -1948,7 +1953,7 @@
           <a:p>
             <a:fld id="{788BAAB1-9E03-4253-A991-98CF19265507}" type="datetimeFigureOut">
               <a:rPr kumimoji="1" lang="ja-JP" altLang="en-US" smtClean="0"/>
-              <a:t>2026/10/5</a:t>
+              <a:t>2026/10/19</a:t>
             </a:fld>
             <a:endParaRPr kumimoji="1" lang="ja-JP" altLang="en-US"/>
           </a:p>
@@ -2043,7 +2048,7 @@
           <a:p>
             <a:fld id="{788BAAB1-9E03-4253-A991-98CF19265507}" type="datetimeFigureOut">
               <a:rPr kumimoji="1" lang="ja-JP" altLang="en-US" smtClean="0"/>
-              <a:t>2026/10/5</a:t>
+              <a:t>2026/10/19</a:t>
             </a:fld>
             <a:endParaRPr kumimoji="1" lang="ja-JP" altLang="en-US"/>
           </a:p>
@@ -2352,7 +2357,7 @@
           <a:p>
             <a:fld id="{788BAAB1-9E03-4253-A991-98CF19265507}" type="datetimeFigureOut">
               <a:rPr kumimoji="1" lang="ja-JP" altLang="en-US" smtClean="0"/>
-              <a:t>2026/10/5</a:t>
+              <a:t>2026/10/19</a:t>
             </a:fld>
             <a:endParaRPr kumimoji="1" lang="ja-JP" altLang="en-US"/>
           </a:p>
@@ -2605,7 +2610,7 @@
           <a:p>
             <a:fld id="{788BAAB1-9E03-4253-A991-98CF19265507}" type="datetimeFigureOut">
               <a:rPr kumimoji="1" lang="ja-JP" altLang="en-US" smtClean="0"/>
-              <a:t>2026/10/5</a:t>
+              <a:t>2026/10/19</a:t>
             </a:fld>
             <a:endParaRPr kumimoji="1" lang="ja-JP" altLang="en-US"/>
           </a:p>
@@ -2850,7 +2855,7 @@
           <a:p>
             <a:fld id="{788BAAB1-9E03-4253-A991-98CF19265507}" type="datetimeFigureOut">
               <a:rPr kumimoji="1" lang="ja-JP" altLang="en-US" smtClean="0"/>
-              <a:t>2026/10/5</a:t>
+              <a:t>2026/10/19</a:t>
             </a:fld>
             <a:endParaRPr kumimoji="1" lang="ja-JP" altLang="en-US"/>
           </a:p>
@@ -3384,12 +3389,12 @@
               <a:t>Unreal </a:t>
             </a:r>
             <a:r>
-              <a:rPr lang="en-US" altLang="ja-JP" dirty="0" err="1" smtClean="0"/>
-              <a:t>Engin</a:t>
-            </a:r>
-            <a:r>
               <a:rPr lang="en-US" altLang="ja-JP" dirty="0" smtClean="0"/>
-              <a:t> 5.5</a:t>
+              <a:t>Engine </a:t>
+            </a:r>
+            <a:r>
+              <a:rPr lang="en-US" altLang="ja-JP" dirty="0" smtClean="0"/>
+              <a:t>5.5</a:t>
             </a:r>
           </a:p>
           <a:p>
@@ -3427,25 +3432,45 @@
           <a:p>
             <a:r>
               <a:rPr lang="ja-JP" altLang="en-US" dirty="0" smtClean="0"/>
-              <a:t>に挑戦する</a:t>
+              <a:t>に</a:t>
+            </a:r>
+            <a:r>
+              <a:rPr lang="ja-JP" altLang="en-US" dirty="0" smtClean="0"/>
+              <a:t>挑戦</a:t>
+            </a:r>
+            <a:r>
+              <a:rPr lang="ja-JP" altLang="en-US" dirty="0" smtClean="0"/>
+              <a:t>します。</a:t>
+            </a:r>
+            <a:endParaRPr lang="en-US" altLang="ja-JP" dirty="0"/>
+          </a:p>
+          <a:p>
+            <a:r>
+              <a:rPr lang="ja-JP" altLang="en-US" dirty="0" smtClean="0"/>
+              <a:t>戦闘時に攻撃か防御を選択し、サイコロを振って出た目を攻撃力、防御力として</a:t>
+            </a:r>
+            <a:r>
+              <a:rPr lang="ja-JP" altLang="en-US" dirty="0" smtClean="0"/>
+              <a:t>使用</a:t>
             </a:r>
             <a:r>
               <a:rPr lang="ja-JP" altLang="en-US" dirty="0"/>
-              <a:t>。</a:t>
+              <a:t>します。</a:t>
             </a:r>
             <a:endParaRPr lang="en-US" altLang="ja-JP" dirty="0"/>
           </a:p>
           <a:p>
             <a:r>
               <a:rPr lang="ja-JP" altLang="en-US" dirty="0" smtClean="0"/>
-              <a:t>戦闘時に攻撃か防御を選択し、サイコロを振って出た目を攻撃力、防御力として使用する。</a:t>
-            </a:r>
-            <a:endParaRPr lang="en-US" altLang="ja-JP" dirty="0"/>
-          </a:p>
-          <a:p>
+              <a:t>さらに、コインを使うことで任意でもう一度サイコロを振ることが</a:t>
+            </a:r>
             <a:r>
               <a:rPr lang="ja-JP" altLang="en-US" dirty="0" smtClean="0"/>
-              <a:t>さらに、コインを使うことで任意でもう一度サイコロを振ることができる。二回目の出目が一回目よりも</a:t>
+              <a:t>できます。</a:t>
+            </a:r>
+            <a:r>
+              <a:rPr lang="ja-JP" altLang="en-US" dirty="0" smtClean="0"/>
+              <a:t>二回目の出目が一回目よりも</a:t>
             </a:r>
             <a:endParaRPr lang="en-US" altLang="ja-JP" dirty="0" smtClean="0"/>
           </a:p>
@@ -3480,7 +3505,15 @@
             </a:r>
             <a:r>
               <a:rPr lang="ja-JP" altLang="en-US" dirty="0" smtClean="0"/>
-              <a:t>倍になる。</a:t>
+              <a:t>倍</a:t>
+            </a:r>
+            <a:r>
+              <a:rPr lang="ja-JP" altLang="en-US" dirty="0" smtClean="0"/>
+              <a:t>に</a:t>
+            </a:r>
+            <a:r>
+              <a:rPr lang="ja-JP" altLang="en-US" dirty="0"/>
+              <a:t>なります。</a:t>
             </a:r>
             <a:endParaRPr lang="en-US" altLang="ja-JP" dirty="0" smtClean="0"/>
           </a:p>
@@ -3506,7 +3539,11 @@
           <a:p>
             <a:r>
               <a:rPr lang="ja-JP" altLang="en-US" dirty="0" smtClean="0"/>
-              <a:t>マップ上の宝箱からサイコロを強化するアイテムを入手できる。</a:t>
+              <a:t>マップ上の宝箱からサイコロを強化するアイテムを入手</a:t>
+            </a:r>
+            <a:r>
+              <a:rPr lang="ja-JP" altLang="en-US" dirty="0" smtClean="0"/>
+              <a:t>できます。</a:t>
             </a:r>
             <a:endParaRPr lang="en-US" altLang="ja-JP" dirty="0" smtClean="0"/>
           </a:p>
@@ -3525,7 +3562,11 @@
             </a:r>
             <a:r>
               <a:rPr lang="ja-JP" altLang="en-US" dirty="0" smtClean="0"/>
-              <a:t>することが重要となっている。</a:t>
+              <a:t>することが重要となって</a:t>
+            </a:r>
+            <a:r>
+              <a:rPr lang="ja-JP" altLang="en-US" dirty="0" smtClean="0"/>
+              <a:t>います。</a:t>
             </a:r>
             <a:endParaRPr lang="en-US" altLang="ja-JP" dirty="0" smtClean="0"/>
           </a:p>
@@ -3616,7 +3657,7 @@
         <p:spPr>
           <a:xfrm>
             <a:off x="629174" y="5645791"/>
-            <a:ext cx="5032147" cy="369332"/>
+            <a:ext cx="11264622" cy="923330"/>
           </a:xfrm>
           <a:prstGeom prst="rect">
             <a:avLst/>
@@ -3630,10 +3671,59 @@
           <a:lstStyle/>
           <a:p>
             <a:r>
-              <a:rPr kumimoji="1" lang="ja-JP" altLang="en-US" dirty="0" smtClean="0"/>
-              <a:t>ローグライクにギャンブル要素を入れたゲーム</a:t>
-            </a:r>
-            <a:endParaRPr kumimoji="1" lang="ja-JP" altLang="en-US" dirty="0"/>
+              <a:rPr lang="ja-JP" altLang="en-US" dirty="0"/>
+              <a:t>プレイヤーは、ランダムに生成されるマップを進みながら敵との戦闘やイベントに</a:t>
+            </a:r>
+            <a:r>
+              <a:rPr lang="ja-JP" altLang="en-US" dirty="0" smtClean="0"/>
+              <a:t>挑戦</a:t>
+            </a:r>
+            <a:r>
+              <a:rPr lang="ja-JP" altLang="en-US" dirty="0"/>
+              <a:t>します。</a:t>
+            </a:r>
+            <a:endParaRPr lang="en-US" altLang="ja-JP" dirty="0" smtClean="0"/>
+          </a:p>
+          <a:p>
+            <a:r>
+              <a:rPr lang="ja-JP" altLang="en-US" dirty="0" smtClean="0"/>
+              <a:t>サイコロ</a:t>
+            </a:r>
+            <a:r>
+              <a:rPr lang="ja-JP" altLang="en-US" dirty="0"/>
+              <a:t>の強化やコインの管理を行い、戦闘を有利に進めながら最終地点にいるボスの撃破を</a:t>
+            </a:r>
+            <a:r>
+              <a:rPr lang="ja-JP" altLang="en-US" dirty="0" smtClean="0"/>
+              <a:t>目指します。</a:t>
+            </a:r>
+            <a:endParaRPr lang="en-US" altLang="ja-JP" dirty="0" smtClean="0"/>
+          </a:p>
+          <a:p>
+            <a:r>
+              <a:rPr lang="en-US" altLang="ja-JP" dirty="0" smtClean="0"/>
+              <a:t>HP</a:t>
+            </a:r>
+            <a:r>
+              <a:rPr lang="ja-JP" altLang="en-US" dirty="0"/>
+              <a:t>が</a:t>
+            </a:r>
+            <a:r>
+              <a:rPr lang="en-US" altLang="ja-JP" dirty="0"/>
+              <a:t>0</a:t>
+            </a:r>
+            <a:r>
+              <a:rPr lang="ja-JP" altLang="en-US" dirty="0"/>
+              <a:t>になるとゲームオーバー</a:t>
+            </a:r>
+            <a:r>
+              <a:rPr lang="ja-JP" altLang="en-US" dirty="0" smtClean="0"/>
+              <a:t>と</a:t>
+            </a:r>
+            <a:r>
+              <a:rPr lang="ja-JP" altLang="en-US" dirty="0"/>
+              <a:t>なっています。</a:t>
+            </a:r>
           </a:p>
         </p:txBody>
       </p:sp>
@@ -3696,11 +3786,6 @@
               </a:rPr>
               <a:t>面白いポイント</a:t>
             </a:r>
-            <a:endParaRPr lang="ja-JP" altLang="en-US" sz="3600" dirty="0">
-              <a:solidFill>
-                <a:srgbClr val="FF0000"/>
-              </a:solidFill>
-            </a:endParaRPr>
           </a:p>
         </p:txBody>
       </p:sp>

--- a/企画書.pptx
+++ b/企画書.pptx
@@ -3320,6 +3320,13 @@
   <p:clrMapOvr>
     <a:masterClrMapping/>
   </p:clrMapOvr>
+  <p:timing>
+    <p:tnLst>
+      <p:par>
+        <p:cTn id="1" dur="indefinite" restart="never" nodeType="tmRoot"/>
+      </p:par>
+    </p:tnLst>
+  </p:timing>
 </p:sld>
 </file>
 
@@ -3386,16 +3393,13 @@
             </a:r>
             <a:r>
               <a:rPr lang="en-US" altLang="ja-JP" dirty="0" smtClean="0"/>
-              <a:t>Unreal </a:t>
+              <a:t>Unreal Engine </a:t>
             </a:r>
             <a:r>
               <a:rPr lang="en-US" altLang="ja-JP" dirty="0" smtClean="0"/>
-              <a:t>Engine </a:t>
-            </a:r>
-            <a:r>
-              <a:rPr lang="en-US" altLang="ja-JP" dirty="0" smtClean="0"/>
-              <a:t>5.5</a:t>
-            </a:r>
+              <a:t>5.5.4</a:t>
+            </a:r>
+            <a:endParaRPr lang="en-US" altLang="ja-JP" dirty="0" smtClean="0"/>
           </a:p>
           <a:p>
             <a:endParaRPr lang="en-US" altLang="ja-JP" dirty="0"/>
@@ -3432,26 +3436,14 @@
           <a:p>
             <a:r>
               <a:rPr lang="ja-JP" altLang="en-US" dirty="0" smtClean="0"/>
-              <a:t>に</a:t>
-            </a:r>
+              <a:t>に挑戦します。</a:t>
+            </a:r>
+            <a:endParaRPr lang="en-US" altLang="ja-JP" dirty="0"/>
+          </a:p>
+          <a:p>
             <a:r>
               <a:rPr lang="ja-JP" altLang="en-US" dirty="0" smtClean="0"/>
-              <a:t>挑戦</a:t>
-            </a:r>
-            <a:r>
-              <a:rPr lang="ja-JP" altLang="en-US" dirty="0" smtClean="0"/>
-              <a:t>します。</a:t>
-            </a:r>
-            <a:endParaRPr lang="en-US" altLang="ja-JP" dirty="0"/>
-          </a:p>
-          <a:p>
-            <a:r>
-              <a:rPr lang="ja-JP" altLang="en-US" dirty="0" smtClean="0"/>
-              <a:t>戦闘時に攻撃か防御を選択し、サイコロを振って出た目を攻撃力、防御力として</a:t>
-            </a:r>
-            <a:r>
-              <a:rPr lang="ja-JP" altLang="en-US" dirty="0" smtClean="0"/>
-              <a:t>使用</a:t>
+              <a:t>戦闘時に攻撃か防御を選択し、サイコロを振って出た目を攻撃力、防御力として使用</a:t>
             </a:r>
             <a:r>
               <a:rPr lang="ja-JP" altLang="en-US" dirty="0"/>
@@ -3462,15 +3454,7 @@
           <a:p>
             <a:r>
               <a:rPr lang="ja-JP" altLang="en-US" dirty="0" smtClean="0"/>
-              <a:t>さらに、コインを使うことで任意でもう一度サイコロを振ることが</a:t>
-            </a:r>
-            <a:r>
-              <a:rPr lang="ja-JP" altLang="en-US" dirty="0" smtClean="0"/>
-              <a:t>できます。</a:t>
-            </a:r>
-            <a:r>
-              <a:rPr lang="ja-JP" altLang="en-US" dirty="0" smtClean="0"/>
-              <a:t>二回目の出目が一回目よりも</a:t>
+              <a:t>さらに、コインを使うことで任意でもう一度サイコロを振ることができます。二回目の出目が一回目よりも</a:t>
             </a:r>
             <a:endParaRPr lang="en-US" altLang="ja-JP" dirty="0" smtClean="0"/>
           </a:p>
@@ -3505,11 +3489,7 @@
             </a:r>
             <a:r>
               <a:rPr lang="ja-JP" altLang="en-US" dirty="0" smtClean="0"/>
-              <a:t>倍</a:t>
-            </a:r>
-            <a:r>
-              <a:rPr lang="ja-JP" altLang="en-US" dirty="0" smtClean="0"/>
-              <a:t>に</a:t>
+              <a:t>倍に</a:t>
             </a:r>
             <a:r>
               <a:rPr lang="ja-JP" altLang="en-US" dirty="0"/>
@@ -3539,11 +3519,7 @@
           <a:p>
             <a:r>
               <a:rPr lang="ja-JP" altLang="en-US" dirty="0" smtClean="0"/>
-              <a:t>マップ上の宝箱からサイコロを強化するアイテムを入手</a:t>
-            </a:r>
-            <a:r>
-              <a:rPr lang="ja-JP" altLang="en-US" dirty="0" smtClean="0"/>
-              <a:t>できます。</a:t>
+              <a:t>マップ上の宝箱からサイコロを強化するアイテムを入手できます。</a:t>
             </a:r>
             <a:endParaRPr lang="en-US" altLang="ja-JP" dirty="0" smtClean="0"/>
           </a:p>
@@ -3562,11 +3538,7 @@
             </a:r>
             <a:r>
               <a:rPr lang="ja-JP" altLang="en-US" dirty="0" smtClean="0"/>
-              <a:t>することが重要となって</a:t>
-            </a:r>
-            <a:r>
-              <a:rPr lang="ja-JP" altLang="en-US" dirty="0" smtClean="0"/>
-              <a:t>います。</a:t>
+              <a:t>することが重要となっています。</a:t>
             </a:r>
             <a:endParaRPr lang="en-US" altLang="ja-JP" dirty="0" smtClean="0"/>
           </a:p>
@@ -3737,6 +3709,13 @@
   <p:clrMapOvr>
     <a:masterClrMapping/>
   </p:clrMapOvr>
+  <p:timing>
+    <p:tnLst>
+      <p:par>
+        <p:cTn id="1" dur="indefinite" restart="never" nodeType="tmRoot"/>
+      </p:par>
+    </p:tnLst>
+  </p:timing>
 </p:sld>
 </file>
 
@@ -4524,6 +4503,13 @@
   <p:clrMapOvr>
     <a:masterClrMapping/>
   </p:clrMapOvr>
+  <p:timing>
+    <p:tnLst>
+      <p:par>
+        <p:cTn id="1" dur="indefinite" restart="never" nodeType="tmRoot"/>
+      </p:par>
+    </p:tnLst>
+  </p:timing>
 </p:sld>
 </file>
 
@@ -4553,7 +4539,7 @@
         <p:spPr>
           <a:xfrm>
             <a:off x="577516" y="513347"/>
-            <a:ext cx="2492990" cy="646331"/>
+            <a:ext cx="4801314" cy="646331"/>
           </a:xfrm>
           <a:prstGeom prst="rect">
             <a:avLst/>
@@ -4572,7 +4558,7 @@
                   <a:srgbClr val="FF0000"/>
                 </a:solidFill>
               </a:rPr>
-              <a:t>ゲーム画面</a:t>
+              <a:t>ゲームの大まかな流れ</a:t>
             </a:r>
             <a:endParaRPr kumimoji="1" lang="ja-JP" altLang="en-US" sz="3600" dirty="0">
               <a:solidFill>
@@ -4652,6 +4638,13 @@
   <p:clrMapOvr>
     <a:masterClrMapping/>
   </p:clrMapOvr>
+  <p:timing>
+    <p:tnLst>
+      <p:par>
+        <p:cTn id="1" dur="indefinite" restart="never" nodeType="tmRoot"/>
+      </p:par>
+    </p:tnLst>
+  </p:timing>
 </p:sld>
 </file>
 
